--- a/Lecture slides/NYT A02 - How to Summarize.pptx
+++ b/Lecture slides/NYT A02 - How to Summarize.pptx
@@ -6097,7 +6097,23 @@
             </a:pPr>
             <a:r>
               <a:rPr lang="en"/>
-              <a:t>How to Summarize an Article</a:t>
+              <a:t>How to</a:t>
+            </a:r>
+            <a:endParaRPr/>
+          </a:p>
+          <a:p>
+            <a:pPr indent="0" lvl="0" marL="0" rtl="0" algn="ctr">
+              <a:spcBef>
+                <a:spcPts val="0"/>
+              </a:spcBef>
+              <a:spcAft>
+                <a:spcPts val="0"/>
+              </a:spcAft>
+              <a:buNone/>
+            </a:pPr>
+            <a:r>
+              <a:rPr lang="en"/>
+              <a:t>Summarize an Article</a:t>
             </a:r>
             <a:endParaRPr/>
           </a:p>
@@ -6137,7 +6153,7 @@
             </a:pPr>
             <a:r>
               <a:rPr lang="en"/>
-              <a:t>Dirk Riehle, Univ. Erlangen</a:t>
+              <a:t>Dirk Riehle, FAU Erlangen</a:t>
             </a:r>
             <a:endParaRPr/>
           </a:p>
@@ -6168,7 +6184,7 @@
             </a:pPr>
             <a:r>
               <a:rPr b="1" lang="en"/>
-              <a:t>NYT A02</a:t>
+              <a:t>NYT A01</a:t>
             </a:r>
             <a:endParaRPr b="1"/>
           </a:p>
@@ -9518,27 +9534,19 @@
               <a:buNone/>
             </a:pPr>
             <a:r>
-              <a:rPr b="0" lang="en" sz="900" u="sng">
+              <a:rPr b="0" lang="en" sz="1000" u="sng">
                 <a:solidFill>
                   <a:schemeClr val="hlink"/>
                 </a:solidFill>
                 <a:hlinkClick r:id="rId3"/>
               </a:rPr>
-              <a:t>https://profriehle.com</a:t>
-            </a:r>
-            <a:r>
-              <a:rPr b="0" lang="en" sz="900">
-                <a:solidFill>
-                  <a:schemeClr val="dk2"/>
-                </a:solidFill>
-              </a:rPr>
+              <a:t>uni1.de/nyt</a:t>
+            </a:r>
+            <a:r>
+              <a:rPr b="0" lang="en" sz="1000"/>
               <a:t> </a:t>
             </a:r>
-            <a:endParaRPr b="0" sz="900">
-              <a:solidFill>
-                <a:schemeClr val="dk2"/>
-              </a:solidFill>
-            </a:endParaRPr>
+            <a:endParaRPr b="0" sz="1000"/>
           </a:p>
         </p:txBody>
       </p:sp>
@@ -9639,7 +9647,7 @@
             </a:pPr>
             <a:r>
               <a:rPr lang="en"/>
-              <a:t>© 2012, 2023, 2024 Dirk Riehle, some rights reserved</a:t>
+              <a:t>© 2025 Dirk Riehle, some rights reserved</a:t>
             </a:r>
             <a:endParaRPr/>
           </a:p>
